--- a/data/09_internal_training/training_9.pptx
+++ b/data/09_internal_training/training_9.pptx
@@ -3140,17 +3140,34 @@
           <a:p/>
           <a:p>
             <a:r>
-              <a:t>根据内部财务模型测算，精芯信息有限公司 在未来三年</a:t>
-            </a:r>
-          </a:p>
-          <a:p>
-            <a:r>
-              <a:t>收入复合增长率预计可达到 24% 左右。</a:t>
-            </a:r>
-          </a:p>
-          <a:p>
-            <a:r>
-              <a:t>该预测基于行业需求增长以及公司产能扩张计划。</a:t>
+              <a:t>从产业链角度看，半导体 行业主要由上游设备厂商、</a:t>
+            </a:r>
+          </a:p>
+          <a:p>
+            <a:r>
+              <a:t>中游平台企业以及下游应用厂商组成。</a:t>
+            </a:r>
+          </a:p>
+          <a:p>
+            <a:r>
+              <a:t>华泰通安网络有限公司 主要位于产业链的 中游 环节。</a:t>
+            </a:r>
+          </a:p>
+          <a:p/>
+          <a:p/>
+          <a:p>
+            <a:r>
+              <a:t>从产业链角度看，机器人 行业主要由上游设备厂商、</a:t>
+            </a:r>
+          </a:p>
+          <a:p>
+            <a:r>
+              <a:t>中游平台企业以及下游应用厂商组成。</a:t>
+            </a:r>
+          </a:p>
+          <a:p>
+            <a:r>
+              <a:t>毕博诚信息有限公司 主要位于产业链的 上游 环节。</a:t>
             </a:r>
           </a:p>
           <a:p/>
@@ -3167,24 +3184,7 @@
           </a:p>
           <a:p>
             <a:r>
-              <a:t>浦华众城信息有限公司 主要位于产业链的 上游 环节。</a:t>
-            </a:r>
-          </a:p>
-          <a:p/>
-          <a:p/>
-          <a:p>
-            <a:r>
-              <a:t>风险管理部认为，消费科技 行业仍然面临若干</a:t>
-            </a:r>
-          </a:p>
-          <a:p>
-            <a:r>
-              <a:t>不确定性因素，包括技术迭代风险、政策变化、</a:t>
-            </a:r>
-          </a:p>
-          <a:p>
-            <a:r>
-              <a:t>以及市场竞争加剧等问题。</a:t>
+              <a:t>佳禾传媒有限公司 主要位于产业链的 中游 环节。</a:t>
             </a:r>
           </a:p>
           <a:p/>
@@ -3246,51 +3246,46 @@
           <a:p/>
           <a:p>
             <a:r>
-              <a:t>华辰资本旗下的 HC AI Innovation Fund 在最近的资产配置会议中</a:t>
-            </a:r>
-          </a:p>
-          <a:p>
-            <a:r>
-              <a:t>讨论了 机器人 行业的投资机会，并对 艾提科信科技有限公司</a:t>
-            </a:r>
-          </a:p>
-          <a:p>
-            <a:r>
-              <a:t>进行了重点评估。</a:t>
-            </a:r>
-          </a:p>
-          <a:p/>
-          <a:p/>
-          <a:p>
-            <a:r>
-              <a:t>鸿睿思博网络有限公司 是中国 新能源 行业的重要企业之一。</a:t>
-            </a:r>
-          </a:p>
-          <a:p>
-            <a:r>
-              <a:t>根据华辰资本 资产配置委员会 的研究，该公司成立于 2015 年，</a:t>
-            </a:r>
-          </a:p>
-          <a:p>
-            <a:r>
-              <a:t>目前员工规模约 1240 人。公司近年来持续加大研发投入，</a:t>
-            </a:r>
-          </a:p>
-          <a:p>
-            <a:r>
-              <a:t>在核心技术方面形成了较强的竞争壁垒。</a:t>
-            </a:r>
-          </a:p>
-          <a:p/>
-          <a:p/>
-          <a:p>
-            <a:r>
-              <a:t>根据内部财务模型测算，创亿网络有限公司 在未来三年</a:t>
-            </a:r>
-          </a:p>
-          <a:p>
-            <a:r>
-              <a:t>收入复合增长率预计可达到 10% 左右。</a:t>
+              <a:t>根据内部财务模型测算，华泰通安网络有限公司 在未来三年</a:t>
+            </a:r>
+          </a:p>
+          <a:p>
+            <a:r>
+              <a:t>收入复合增长率预计可达到 19% 左右。</a:t>
+            </a:r>
+          </a:p>
+          <a:p>
+            <a:r>
+              <a:t>该预测基于行业需求增长以及公司产能扩张计划。</a:t>
+            </a:r>
+          </a:p>
+          <a:p/>
+          <a:p/>
+          <a:p>
+            <a:r>
+              <a:t>风险管理部认为，医疗科技 行业仍然面临若干</a:t>
+            </a:r>
+          </a:p>
+          <a:p>
+            <a:r>
+              <a:t>不确定性因素，包括技术迭代风险、政策变化、</a:t>
+            </a:r>
+          </a:p>
+          <a:p>
+            <a:r>
+              <a:t>以及市场竞争加剧等问题。</a:t>
+            </a:r>
+          </a:p>
+          <a:p/>
+          <a:p/>
+          <a:p>
+            <a:r>
+              <a:t>根据内部财务模型测算，泰麒麟网络有限公司 在未来三年</a:t>
+            </a:r>
+          </a:p>
+          <a:p>
+            <a:r>
+              <a:t>收入复合增长率预计可达到 31% 左右。</a:t>
             </a:r>
           </a:p>
           <a:p>
@@ -3357,51 +3352,56 @@
           <a:p/>
           <a:p>
             <a:r>
-              <a:t>风险管理部认为，云计算 行业仍然面临若干</a:t>
-            </a:r>
-          </a:p>
-          <a:p>
-            <a:r>
-              <a:t>不确定性因素，包括技术迭代风险、政策变化、</a:t>
-            </a:r>
-          </a:p>
-          <a:p>
-            <a:r>
-              <a:t>以及市场竞争加剧等问题。</a:t>
-            </a:r>
-          </a:p>
-          <a:p/>
-          <a:p/>
-          <a:p>
-            <a:r>
-              <a:t>华辰资本旗下的 HC Quant Arbitrage Fund 在最近的资产配置会议中</a:t>
-            </a:r>
-          </a:p>
-          <a:p>
-            <a:r>
-              <a:t>讨论了 云计算 行业的投资机会，并对 立信电子网络有限公司</a:t>
-            </a:r>
-          </a:p>
-          <a:p>
-            <a:r>
-              <a:t>进行了重点评估。</a:t>
-            </a:r>
-          </a:p>
-          <a:p/>
-          <a:p/>
-          <a:p>
-            <a:r>
-              <a:t>华辰资本旗下的 HC Quant Arbitrage Fund 在最近的资产配置会议中</a:t>
-            </a:r>
-          </a:p>
-          <a:p>
-            <a:r>
-              <a:t>讨论了 新能源 行业的投资机会，并对 昊嘉网络有限公司</a:t>
-            </a:r>
-          </a:p>
-          <a:p>
-            <a:r>
-              <a:t>进行了重点评估。</a:t>
+              <a:t>从产业链角度看，人工智能 行业主要由上游设备厂商、</a:t>
+            </a:r>
+          </a:p>
+          <a:p>
+            <a:r>
+              <a:t>中游平台企业以及下游应用厂商组成。</a:t>
+            </a:r>
+          </a:p>
+          <a:p>
+            <a:r>
+              <a:t>方正科技传媒有限公司 主要位于产业链的 下游 环节。</a:t>
+            </a:r>
+          </a:p>
+          <a:p/>
+          <a:p/>
+          <a:p>
+            <a:r>
+              <a:t>从产业链角度看，机器人 行业主要由上游设备厂商、</a:t>
+            </a:r>
+          </a:p>
+          <a:p>
+            <a:r>
+              <a:t>中游平台企业以及下游应用厂商组成。</a:t>
+            </a:r>
+          </a:p>
+          <a:p>
+            <a:r>
+              <a:t>图龙信息传媒有限公司 主要位于产业链的 中游 环节。</a:t>
+            </a:r>
+          </a:p>
+          <a:p/>
+          <a:p/>
+          <a:p>
+            <a:r>
+              <a:t>艾提科信科技有限公司 是中国 云计算 行业的重要企业之一。</a:t>
+            </a:r>
+          </a:p>
+          <a:p>
+            <a:r>
+              <a:t>根据华辰资本 量化研究部 的研究，该公司成立于 2006 年，</a:t>
+            </a:r>
+          </a:p>
+          <a:p>
+            <a:r>
+              <a:t>目前员工规模约 3804 人。公司近年来持续加大研发投入，</a:t>
+            </a:r>
+          </a:p>
+          <a:p>
+            <a:r>
+              <a:t>在核心技术方面形成了较强的竞争壁垒。</a:t>
             </a:r>
           </a:p>
           <a:p/>
@@ -3463,7 +3463,29 @@
           <a:p/>
           <a:p>
             <a:r>
-              <a:t>风险管理部认为，人工智能 行业仍然面临若干</a:t>
+              <a:t>信诚致远网络有限公司 是中国 半导体 行业的重要企业之一。</a:t>
+            </a:r>
+          </a:p>
+          <a:p>
+            <a:r>
+              <a:t>根据华辰资本 风险管理部 的研究，该公司成立于 2015 年，</a:t>
+            </a:r>
+          </a:p>
+          <a:p>
+            <a:r>
+              <a:t>目前员工规模约 2901 人。公司近年来持续加大研发投入，</a:t>
+            </a:r>
+          </a:p>
+          <a:p>
+            <a:r>
+              <a:t>在核心技术方面形成了较强的竞争壁垒。</a:t>
+            </a:r>
+          </a:p>
+          <a:p/>
+          <a:p/>
+          <a:p>
+            <a:r>
+              <a:t>风险管理部认为，消费科技 行业仍然面临若干</a:t>
             </a:r>
           </a:p>
           <a:p>
@@ -3480,39 +3502,17 @@
           <a:p/>
           <a:p>
             <a:r>
-              <a:t>从产业链角度看，新能源 行业主要由上游设备厂商、</a:t>
-            </a:r>
-          </a:p>
-          <a:p>
-            <a:r>
-              <a:t>中游平台企业以及下游应用厂商组成。</a:t>
-            </a:r>
-          </a:p>
-          <a:p>
-            <a:r>
-              <a:t>快讯网络有限公司 主要位于产业链的 上游 环节。</a:t>
-            </a:r>
-          </a:p>
-          <a:p/>
-          <a:p/>
-          <a:p>
-            <a:r>
-              <a:t>昂歌信息科技有限公司 是中国 消费科技 行业的重要企业之一。</a:t>
-            </a:r>
-          </a:p>
-          <a:p>
-            <a:r>
-              <a:t>根据华辰资本 资产配置委员会 的研究，该公司成立于 2020 年，</a:t>
-            </a:r>
-          </a:p>
-          <a:p>
-            <a:r>
-              <a:t>目前员工规模约 3973 人。公司近年来持续加大研发投入，</a:t>
-            </a:r>
-          </a:p>
-          <a:p>
-            <a:r>
-              <a:t>在核心技术方面形成了较强的竞争壁垒。</a:t>
+              <a:t>风险管理部认为，消费科技 行业仍然面临若干</a:t>
+            </a:r>
+          </a:p>
+          <a:p>
+            <a:r>
+              <a:t>不确定性因素，包括技术迭代风险、政策变化、</a:t>
+            </a:r>
+          </a:p>
+          <a:p>
+            <a:r>
+              <a:t>以及市场竞争加剧等问题。</a:t>
             </a:r>
           </a:p>
           <a:p/>
@@ -3574,7 +3574,7 @@
           <a:p/>
           <a:p>
             <a:r>
-              <a:t>从产业链角度看，医疗科技 行业主要由上游设备厂商、</a:t>
+              <a:t>从产业链角度看，人工智能 行业主要由上游设备厂商、</a:t>
             </a:r>
           </a:p>
           <a:p>
@@ -3584,41 +3584,41 @@
           </a:p>
           <a:p>
             <a:r>
-              <a:t>凌云网络有限公司 主要位于产业链的 上游 环节。</a:t>
-            </a:r>
-          </a:p>
-          <a:p/>
-          <a:p/>
-          <a:p>
-            <a:r>
-              <a:t>从产业链角度看，消费科技 行业主要由上游设备厂商、</a:t>
-            </a:r>
-          </a:p>
-          <a:p>
-            <a:r>
-              <a:t>中游平台企业以及下游应用厂商组成。</a:t>
-            </a:r>
-          </a:p>
-          <a:p>
-            <a:r>
-              <a:t>和泰传媒有限公司 主要位于产业链的 中游 环节。</a:t>
-            </a:r>
-          </a:p>
-          <a:p/>
-          <a:p/>
-          <a:p>
-            <a:r>
-              <a:t>从产业链角度看，云计算 行业主要由上游设备厂商、</a:t>
-            </a:r>
-          </a:p>
-          <a:p>
-            <a:r>
-              <a:t>中游平台企业以及下游应用厂商组成。</a:t>
-            </a:r>
-          </a:p>
-          <a:p>
-            <a:r>
-              <a:t>天益信息有限公司 主要位于产业链的 下游 环节。</a:t>
+              <a:t>通际名联科技有限公司 主要位于产业链的 下游 环节。</a:t>
+            </a:r>
+          </a:p>
+          <a:p/>
+          <a:p/>
+          <a:p>
+            <a:r>
+              <a:t>华辰资本旗下的 HC Global Macro Fund 在最近的资产配置会议中</a:t>
+            </a:r>
+          </a:p>
+          <a:p>
+            <a:r>
+              <a:t>讨论了 消费科技 行业的投资机会，并对 联软科技有限公司</a:t>
+            </a:r>
+          </a:p>
+          <a:p>
+            <a:r>
+              <a:t>进行了重点评估。</a:t>
+            </a:r>
+          </a:p>
+          <a:p/>
+          <a:p/>
+          <a:p>
+            <a:r>
+              <a:t>风险管理部认为，医疗科技 行业仍然面临若干</a:t>
+            </a:r>
+          </a:p>
+          <a:p>
+            <a:r>
+              <a:t>不确定性因素，包括技术迭代风险、政策变化、</a:t>
+            </a:r>
+          </a:p>
+          <a:p>
+            <a:r>
+              <a:t>以及市场竞争加剧等问题。</a:t>
             </a:r>
           </a:p>
           <a:p/>
@@ -3680,51 +3680,51 @@
           <a:p/>
           <a:p>
             <a:r>
-              <a:t>风险管理部认为，新能源 行业仍然面临若干</a:t>
-            </a:r>
-          </a:p>
-          <a:p>
-            <a:r>
-              <a:t>不确定性因素，包括技术迭代风险、政策变化、</a:t>
-            </a:r>
-          </a:p>
-          <a:p>
-            <a:r>
-              <a:t>以及市场竞争加剧等问题。</a:t>
-            </a:r>
-          </a:p>
-          <a:p/>
-          <a:p/>
-          <a:p>
-            <a:r>
-              <a:t>风险管理部认为，机器人 行业仍然面临若干</a:t>
-            </a:r>
-          </a:p>
-          <a:p>
-            <a:r>
-              <a:t>不确定性因素，包括技术迭代风险、政策变化、</a:t>
-            </a:r>
-          </a:p>
-          <a:p>
-            <a:r>
-              <a:t>以及市场竞争加剧等问题。</a:t>
-            </a:r>
-          </a:p>
-          <a:p/>
-          <a:p/>
-          <a:p>
-            <a:r>
-              <a:t>华辰资本旗下的 HC Global Macro Fund 在最近的资产配置会议中</a:t>
-            </a:r>
-          </a:p>
-          <a:p>
-            <a:r>
-              <a:t>讨论了 云计算 行业的投资机会，并对 天益信息有限公司</a:t>
-            </a:r>
-          </a:p>
-          <a:p>
-            <a:r>
-              <a:t>进行了重点评估。</a:t>
+              <a:t>根据内部财务模型测算，艾提科信科技有限公司 在未来三年</a:t>
+            </a:r>
+          </a:p>
+          <a:p>
+            <a:r>
+              <a:t>收入复合增长率预计可达到 27% 左右。</a:t>
+            </a:r>
+          </a:p>
+          <a:p>
+            <a:r>
+              <a:t>该预测基于行业需求增长以及公司产能扩张计划。</a:t>
+            </a:r>
+          </a:p>
+          <a:p/>
+          <a:p/>
+          <a:p>
+            <a:r>
+              <a:t>根据内部财务模型测算，昊嘉科技有限公司 在未来三年</a:t>
+            </a:r>
+          </a:p>
+          <a:p>
+            <a:r>
+              <a:t>收入复合增长率预计可达到 30% 左右。</a:t>
+            </a:r>
+          </a:p>
+          <a:p>
+            <a:r>
+              <a:t>该预测基于行业需求增长以及公司产能扩张计划。</a:t>
+            </a:r>
+          </a:p>
+          <a:p/>
+          <a:p/>
+          <a:p>
+            <a:r>
+              <a:t>根据内部财务模型测算，信诚致远科技有限公司 在未来三年</a:t>
+            </a:r>
+          </a:p>
+          <a:p>
+            <a:r>
+              <a:t>收入复合增长率预计可达到 27% 左右。</a:t>
+            </a:r>
+          </a:p>
+          <a:p>
+            <a:r>
+              <a:t>该预测基于行业需求增长以及公司产能扩张计划。</a:t>
             </a:r>
           </a:p>
           <a:p/>
@@ -3786,51 +3786,51 @@
           <a:p/>
           <a:p>
             <a:r>
-              <a:t>风险管理部认为，半导体 行业仍然面临若干</a:t>
-            </a:r>
-          </a:p>
-          <a:p>
-            <a:r>
-              <a:t>不确定性因素，包括技术迭代风险、政策变化、</a:t>
-            </a:r>
-          </a:p>
-          <a:p>
-            <a:r>
-              <a:t>以及市场竞争加剧等问题。</a:t>
-            </a:r>
-          </a:p>
-          <a:p/>
-          <a:p/>
-          <a:p>
-            <a:r>
-              <a:t>风险管理部认为，新能源 行业仍然面临若干</a:t>
-            </a:r>
-          </a:p>
-          <a:p>
-            <a:r>
-              <a:t>不确定性因素，包括技术迭代风险、政策变化、</a:t>
-            </a:r>
-          </a:p>
-          <a:p>
-            <a:r>
-              <a:t>以及市场竞争加剧等问题。</a:t>
-            </a:r>
-          </a:p>
-          <a:p/>
-          <a:p/>
-          <a:p>
-            <a:r>
-              <a:t>根据内部财务模型测算，昊嘉网络有限公司 在未来三年</a:t>
-            </a:r>
-          </a:p>
-          <a:p>
-            <a:r>
-              <a:t>收入复合增长率预计可达到 10% 左右。</a:t>
+              <a:t>从产业链角度看，云计算 行业主要由上游设备厂商、</a:t>
+            </a:r>
+          </a:p>
+          <a:p>
+            <a:r>
+              <a:t>中游平台企业以及下游应用厂商组成。</a:t>
+            </a:r>
+          </a:p>
+          <a:p>
+            <a:r>
+              <a:t>佳禾传媒有限公司 主要位于产业链的 中游 环节。</a:t>
+            </a:r>
+          </a:p>
+          <a:p/>
+          <a:p/>
+          <a:p>
+            <a:r>
+              <a:t>根据内部财务模型测算，惠派国际公司科技有限公司 在未来三年</a:t>
+            </a:r>
+          </a:p>
+          <a:p>
+            <a:r>
+              <a:t>收入复合增长率预计可达到 17% 左右。</a:t>
             </a:r>
           </a:p>
           <a:p>
             <a:r>
               <a:t>该预测基于行业需求增长以及公司产能扩张计划。</a:t>
+            </a:r>
+          </a:p>
+          <a:p/>
+          <a:p/>
+          <a:p>
+            <a:r>
+              <a:t>华辰资本旗下的 HC Global Macro Fund 在最近的资产配置会议中</a:t>
+            </a:r>
+          </a:p>
+          <a:p>
+            <a:r>
+              <a:t>讨论了 半导体 行业的投资机会，并对 雨林木风计算机科技有限公司</a:t>
+            </a:r>
+          </a:p>
+          <a:p>
+            <a:r>
+              <a:t>进行了重点评估。</a:t>
             </a:r>
           </a:p>
           <a:p/>
@@ -3892,56 +3892,51 @@
           <a:p/>
           <a:p>
             <a:r>
-              <a:t>根据内部财务模型测算，东方峻景网络有限公司 在未来三年</a:t>
-            </a:r>
-          </a:p>
-          <a:p>
-            <a:r>
-              <a:t>收入复合增长率预计可达到 11% 左右。</a:t>
-            </a:r>
-          </a:p>
-          <a:p>
-            <a:r>
-              <a:t>该预测基于行业需求增长以及公司产能扩张计划。</a:t>
-            </a:r>
-          </a:p>
-          <a:p/>
-          <a:p/>
-          <a:p>
-            <a:r>
-              <a:t>根据内部财务模型测算，和泰科技有限公司 在未来三年</a:t>
-            </a:r>
-          </a:p>
-          <a:p>
-            <a:r>
-              <a:t>收入复合增长率预计可达到 29% 左右。</a:t>
-            </a:r>
-          </a:p>
-          <a:p>
-            <a:r>
-              <a:t>该预测基于行业需求增长以及公司产能扩张计划。</a:t>
-            </a:r>
-          </a:p>
-          <a:p/>
-          <a:p/>
-          <a:p>
-            <a:r>
-              <a:t>和泰传媒有限公司 是中国 消费科技 行业的重要企业之一。</a:t>
-            </a:r>
-          </a:p>
-          <a:p>
-            <a:r>
-              <a:t>根据华辰资本 资产配置委员会 的研究，该公司成立于 2020 年，</a:t>
-            </a:r>
-          </a:p>
-          <a:p>
-            <a:r>
-              <a:t>目前员工规模约 7048 人。公司近年来持续加大研发投入，</a:t>
-            </a:r>
-          </a:p>
-          <a:p>
-            <a:r>
-              <a:t>在核心技术方面形成了较强的竞争壁垒。</a:t>
+              <a:t>从产业链角度看，消费科技 行业主要由上游设备厂商、</a:t>
+            </a:r>
+          </a:p>
+          <a:p>
+            <a:r>
+              <a:t>中游平台企业以及下游应用厂商组成。</a:t>
+            </a:r>
+          </a:p>
+          <a:p>
+            <a:r>
+              <a:t>飞海科技传媒有限公司 主要位于产业链的 中游 环节。</a:t>
+            </a:r>
+          </a:p>
+          <a:p/>
+          <a:p/>
+          <a:p>
+            <a:r>
+              <a:t>风险管理部认为，人工智能 行业仍然面临若干</a:t>
+            </a:r>
+          </a:p>
+          <a:p>
+            <a:r>
+              <a:t>不确定性因素，包括技术迭代风险、政策变化、</a:t>
+            </a:r>
+          </a:p>
+          <a:p>
+            <a:r>
+              <a:t>以及市场竞争加剧等问题。</a:t>
+            </a:r>
+          </a:p>
+          <a:p/>
+          <a:p/>
+          <a:p>
+            <a:r>
+              <a:t>华辰资本旗下的 HC AI Innovation Fund 在最近的资产配置会议中</a:t>
+            </a:r>
+          </a:p>
+          <a:p>
+            <a:r>
+              <a:t>讨论了 半导体 行业的投资机会，并对 精芯信息有限公司</a:t>
+            </a:r>
+          </a:p>
+          <a:p>
+            <a:r>
+              <a:t>进行了重点评估。</a:t>
             </a:r>
           </a:p>
           <a:p/>
@@ -4003,51 +3998,61 @@
           <a:p/>
           <a:p>
             <a:r>
-              <a:t>根据内部财务模型测算，雨林木风计算机网络有限公司 在未来三年</a:t>
-            </a:r>
-          </a:p>
-          <a:p>
-            <a:r>
-              <a:t>收入复合增长率预计可达到 28% 左右。</a:t>
+              <a:t>泰麒麟网络有限公司 是中国 云计算 行业的重要企业之一。</a:t>
+            </a:r>
+          </a:p>
+          <a:p>
+            <a:r>
+              <a:t>根据华辰资本 量化研究部 的研究，该公司成立于 2010 年，</a:t>
+            </a:r>
+          </a:p>
+          <a:p>
+            <a:r>
+              <a:t>目前员工规模约 4251 人。公司近年来持续加大研发投入，</a:t>
+            </a:r>
+          </a:p>
+          <a:p>
+            <a:r>
+              <a:t>在核心技术方面形成了较强的竞争壁垒。</a:t>
+            </a:r>
+          </a:p>
+          <a:p/>
+          <a:p/>
+          <a:p>
+            <a:r>
+              <a:t>方正科技传媒有限公司 是中国 人工智能 行业的重要企业之一。</a:t>
+            </a:r>
+          </a:p>
+          <a:p>
+            <a:r>
+              <a:t>根据华辰资本 资产配置委员会 的研究，该公司成立于 2019 年，</a:t>
+            </a:r>
+          </a:p>
+          <a:p>
+            <a:r>
+              <a:t>目前员工规模约 2043 人。公司近年来持续加大研发投入，</a:t>
+            </a:r>
+          </a:p>
+          <a:p>
+            <a:r>
+              <a:t>在核心技术方面形成了较强的竞争壁垒。</a:t>
+            </a:r>
+          </a:p>
+          <a:p/>
+          <a:p/>
+          <a:p>
+            <a:r>
+              <a:t>根据内部财务模型测算，华泰通安传媒有限公司 在未来三年</a:t>
+            </a:r>
+          </a:p>
+          <a:p>
+            <a:r>
+              <a:t>收入复合增长率预计可达到 12% 左右。</a:t>
             </a:r>
           </a:p>
           <a:p>
             <a:r>
               <a:t>该预测基于行业需求增长以及公司产能扩张计划。</a:t>
-            </a:r>
-          </a:p>
-          <a:p/>
-          <a:p/>
-          <a:p>
-            <a:r>
-              <a:t>根据内部财务模型测算，华远软件信息有限公司 在未来三年</a:t>
-            </a:r>
-          </a:p>
-          <a:p>
-            <a:r>
-              <a:t>收入复合增长率预计可达到 15% 左右。</a:t>
-            </a:r>
-          </a:p>
-          <a:p>
-            <a:r>
-              <a:t>该预测基于行业需求增长以及公司产能扩张计划。</a:t>
-            </a:r>
-          </a:p>
-          <a:p/>
-          <a:p/>
-          <a:p>
-            <a:r>
-              <a:t>风险管理部认为，医疗科技 行业仍然面临若干</a:t>
-            </a:r>
-          </a:p>
-          <a:p>
-            <a:r>
-              <a:t>不确定性因素，包括技术迭代风险、政策变化、</a:t>
-            </a:r>
-          </a:p>
-          <a:p>
-            <a:r>
-              <a:t>以及市场竞争加剧等问题。</a:t>
             </a:r>
           </a:p>
           <a:p/>
@@ -4109,51 +4114,61 @@
           <a:p/>
           <a:p>
             <a:r>
-              <a:t>华辰资本旗下的 HC Energy Transition Fund 在最近的资产配置会议中</a:t>
-            </a:r>
-          </a:p>
-          <a:p>
-            <a:r>
-              <a:t>讨论了 机器人 行业的投资机会，并对 济南亿次元网络有限公司</a:t>
-            </a:r>
-          </a:p>
-          <a:p>
-            <a:r>
-              <a:t>进行了重点评估。</a:t>
-            </a:r>
-          </a:p>
-          <a:p/>
-          <a:p/>
-          <a:p>
-            <a:r>
-              <a:t>从产业链角度看，消费科技 行业主要由上游设备厂商、</a:t>
-            </a:r>
-          </a:p>
-          <a:p>
-            <a:r>
-              <a:t>中游平台企业以及下游应用厂商组成。</a:t>
-            </a:r>
-          </a:p>
-          <a:p>
-            <a:r>
-              <a:t>南康网络有限公司 主要位于产业链的 上游 环节。</a:t>
-            </a:r>
-          </a:p>
-          <a:p/>
-          <a:p/>
-          <a:p>
-            <a:r>
-              <a:t>华辰资本旗下的 HC AI Innovation Fund 在最近的资产配置会议中</a:t>
-            </a:r>
-          </a:p>
-          <a:p>
-            <a:r>
-              <a:t>讨论了 云计算 行业的投资机会，并对 浦华众城信息有限公司</a:t>
-            </a:r>
-          </a:p>
-          <a:p>
-            <a:r>
-              <a:t>进行了重点评估。</a:t>
+              <a:t>创联世纪信息有限公司 是中国 云计算 行业的重要企业之一。</a:t>
+            </a:r>
+          </a:p>
+          <a:p>
+            <a:r>
+              <a:t>根据华辰资本 资产配置委员会 的研究，该公司成立于 2005 年，</a:t>
+            </a:r>
+          </a:p>
+          <a:p>
+            <a:r>
+              <a:t>目前员工规模约 3637 人。公司近年来持续加大研发投入，</a:t>
+            </a:r>
+          </a:p>
+          <a:p>
+            <a:r>
+              <a:t>在核心技术方面形成了较强的竞争壁垒。</a:t>
+            </a:r>
+          </a:p>
+          <a:p/>
+          <a:p/>
+          <a:p>
+            <a:r>
+              <a:t>方正科技传媒有限公司 是中国 人工智能 行业的重要企业之一。</a:t>
+            </a:r>
+          </a:p>
+          <a:p>
+            <a:r>
+              <a:t>根据华辰资本 风险管理部 的研究，该公司成立于 2019 年，</a:t>
+            </a:r>
+          </a:p>
+          <a:p>
+            <a:r>
+              <a:t>目前员工规模约 2043 人。公司近年来持续加大研发投入，</a:t>
+            </a:r>
+          </a:p>
+          <a:p>
+            <a:r>
+              <a:t>在核心技术方面形成了较强的竞争壁垒。</a:t>
+            </a:r>
+          </a:p>
+          <a:p/>
+          <a:p/>
+          <a:p>
+            <a:r>
+              <a:t>根据内部财务模型测算，华泰通安传媒有限公司 在未来三年</a:t>
+            </a:r>
+          </a:p>
+          <a:p>
+            <a:r>
+              <a:t>收入复合增长率预计可达到 18% 左右。</a:t>
+            </a:r>
+          </a:p>
+          <a:p>
+            <a:r>
+              <a:t>该预测基于行业需求增长以及公司产能扩张计划。</a:t>
             </a:r>
           </a:p>
           <a:p/>
@@ -4215,29 +4230,12 @@
           <a:p/>
           <a:p>
             <a:r>
-              <a:t>从产业链角度看，消费科技 行业主要由上游设备厂商、</a:t>
-            </a:r>
-          </a:p>
-          <a:p>
-            <a:r>
-              <a:t>中游平台企业以及下游应用厂商组成。</a:t>
-            </a:r>
-          </a:p>
-          <a:p>
-            <a:r>
-              <a:t>精芯信息有限公司 主要位于产业链的 中游 环节。</a:t>
-            </a:r>
-          </a:p>
-          <a:p/>
-          <a:p/>
-          <a:p>
-            <a:r>
-              <a:t>华辰资本旗下的 HC Global Macro Fund 在最近的资产配置会议中</a:t>
-            </a:r>
-          </a:p>
-          <a:p>
-            <a:r>
-              <a:t>讨论了 机器人 行业的投资机会，并对 艾提科信科技有限公司</a:t>
+              <a:t>华辰资本旗下的 HC AI Innovation Fund 在最近的资产配置会议中</a:t>
+            </a:r>
+          </a:p>
+          <a:p>
+            <a:r>
+              <a:t>讨论了 人工智能 行业的投资机会，并对 方正科技传媒有限公司</a:t>
             </a:r>
           </a:p>
           <a:p>
@@ -4249,17 +4247,34 @@
           <a:p/>
           <a:p>
             <a:r>
-              <a:t>从产业链角度看，医疗科技 行业主要由上游设备厂商、</a:t>
-            </a:r>
-          </a:p>
-          <a:p>
-            <a:r>
-              <a:t>中游平台企业以及下游应用厂商组成。</a:t>
-            </a:r>
-          </a:p>
-          <a:p>
-            <a:r>
-              <a:t>创联世纪科技有限公司 主要位于产业链的 下游 环节。</a:t>
+              <a:t>风险管理部认为，新能源 行业仍然面临若干</a:t>
+            </a:r>
+          </a:p>
+          <a:p>
+            <a:r>
+              <a:t>不确定性因素，包括技术迭代风险、政策变化、</a:t>
+            </a:r>
+          </a:p>
+          <a:p>
+            <a:r>
+              <a:t>以及市场竞争加剧等问题。</a:t>
+            </a:r>
+          </a:p>
+          <a:p/>
+          <a:p/>
+          <a:p>
+            <a:r>
+              <a:t>华辰资本旗下的 HC Alpha Growth Fund 在最近的资产配置会议中</a:t>
+            </a:r>
+          </a:p>
+          <a:p>
+            <a:r>
+              <a:t>讨论了 新能源 行业的投资机会，并对 恩悌网络有限公司</a:t>
+            </a:r>
+          </a:p>
+          <a:p>
+            <a:r>
+              <a:t>进行了重点评估。</a:t>
             </a:r>
           </a:p>
           <a:p/>
@@ -4321,29 +4336,24 @@
           <a:p/>
           <a:p>
             <a:r>
-              <a:t>九方信息有限公司 是中国 新能源 行业的重要企业之一。</a:t>
-            </a:r>
-          </a:p>
-          <a:p>
-            <a:r>
-              <a:t>根据华辰资本 投资策略部 的研究，该公司成立于 2011 年，</a:t>
-            </a:r>
-          </a:p>
-          <a:p>
-            <a:r>
-              <a:t>目前员工规模约 6198 人。公司近年来持续加大研发投入，</a:t>
-            </a:r>
-          </a:p>
-          <a:p>
-            <a:r>
-              <a:t>在核心技术方面形成了较强的竞争壁垒。</a:t>
-            </a:r>
-          </a:p>
-          <a:p/>
-          <a:p/>
-          <a:p>
-            <a:r>
-              <a:t>从产业链角度看，新能源 行业主要由上游设备厂商、</a:t>
+              <a:t>风险管理部认为，新能源 行业仍然面临若干</a:t>
+            </a:r>
+          </a:p>
+          <a:p>
+            <a:r>
+              <a:t>不确定性因素，包括技术迭代风险、政策变化、</a:t>
+            </a:r>
+          </a:p>
+          <a:p>
+            <a:r>
+              <a:t>以及市场竞争加剧等问题。</a:t>
+            </a:r>
+          </a:p>
+          <a:p/>
+          <a:p/>
+          <a:p>
+            <a:r>
+              <a:t>从产业链角度看，消费科技 行业主要由上游设备厂商、</a:t>
             </a:r>
           </a:p>
           <a:p>
@@ -4353,24 +4363,24 @@
           </a:p>
           <a:p>
             <a:r>
-              <a:t>鸿睿思博网络有限公司 主要位于产业链的 中游 环节。</a:t>
-            </a:r>
-          </a:p>
-          <a:p/>
-          <a:p/>
-          <a:p>
-            <a:r>
-              <a:t>浦华众城科技有限公司 是中国 半导体 行业的重要企业之一。</a:t>
-            </a:r>
-          </a:p>
-          <a:p>
-            <a:r>
-              <a:t>根据华辰资本 投资策略部 的研究，该公司成立于 2015 年，</a:t>
-            </a:r>
-          </a:p>
-          <a:p>
-            <a:r>
-              <a:t>目前员工规模约 273 人。公司近年来持续加大研发投入，</a:t>
+              <a:t>天开科技有限公司 主要位于产业链的 下游 环节。</a:t>
+            </a:r>
+          </a:p>
+          <a:p/>
+          <a:p/>
+          <a:p>
+            <a:r>
+              <a:t>毕博诚信息有限公司 是中国 机器人 行业的重要企业之一。</a:t>
+            </a:r>
+          </a:p>
+          <a:p>
+            <a:r>
+              <a:t>根据华辰资本 量化研究部 的研究，该公司成立于 2017 年，</a:t>
+            </a:r>
+          </a:p>
+          <a:p>
+            <a:r>
+              <a:t>目前员工规模约 508 人。公司近年来持续加大研发投入，</a:t>
             </a:r>
           </a:p>
           <a:p>
@@ -4437,7 +4447,46 @@
           <a:p/>
           <a:p>
             <a:r>
-              <a:t>从产业链角度看，云计算 行业主要由上游设备厂商、</a:t>
+              <a:t>华成育卓科技有限公司 是中国 医疗科技 行业的重要企业之一。</a:t>
+            </a:r>
+          </a:p>
+          <a:p>
+            <a:r>
+              <a:t>根据华辰资本 资产配置委员会 的研究，该公司成立于 2020 年，</a:t>
+            </a:r>
+          </a:p>
+          <a:p>
+            <a:r>
+              <a:t>目前员工规模约 650 人。公司近年来持续加大研发投入，</a:t>
+            </a:r>
+          </a:p>
+          <a:p>
+            <a:r>
+              <a:t>在核心技术方面形成了较强的竞争壁垒。</a:t>
+            </a:r>
+          </a:p>
+          <a:p/>
+          <a:p/>
+          <a:p>
+            <a:r>
+              <a:t>根据内部财务模型测算，中建创业科技有限公司 在未来三年</a:t>
+            </a:r>
+          </a:p>
+          <a:p>
+            <a:r>
+              <a:t>收入复合增长率预计可达到 34% 左右。</a:t>
+            </a:r>
+          </a:p>
+          <a:p>
+            <a:r>
+              <a:t>该预测基于行业需求增长以及公司产能扩张计划。</a:t>
+            </a:r>
+          </a:p>
+          <a:p/>
+          <a:p/>
+          <a:p>
+            <a:r>
+              <a:t>从产业链角度看，人工智能 行业主要由上游设备厂商、</a:t>
             </a:r>
           </a:p>
           <a:p>
@@ -4447,41 +4496,7 @@
           </a:p>
           <a:p>
             <a:r>
-              <a:t>易动力科技有限公司 主要位于产业链的 上游 环节。</a:t>
-            </a:r>
-          </a:p>
-          <a:p/>
-          <a:p/>
-          <a:p>
-            <a:r>
-              <a:t>根据内部财务模型测算，昊嘉网络有限公司 在未来三年</a:t>
-            </a:r>
-          </a:p>
-          <a:p>
-            <a:r>
-              <a:t>收入复合增长率预计可达到 16% 左右。</a:t>
-            </a:r>
-          </a:p>
-          <a:p>
-            <a:r>
-              <a:t>该预测基于行业需求增长以及公司产能扩张计划。</a:t>
-            </a:r>
-          </a:p>
-          <a:p/>
-          <a:p/>
-          <a:p>
-            <a:r>
-              <a:t>从产业链角度看，云计算 行业主要由上游设备厂商、</a:t>
-            </a:r>
-          </a:p>
-          <a:p>
-            <a:r>
-              <a:t>中游平台企业以及下游应用厂商组成。</a:t>
-            </a:r>
-          </a:p>
-          <a:p>
-            <a:r>
-              <a:t>天益信息有限公司 主要位于产业链的 下游 环节。</a:t>
+              <a:t>方正科技传媒有限公司 主要位于产业链的 下游 环节。</a:t>
             </a:r>
           </a:p>
           <a:p/>
@@ -4543,24 +4558,7 @@
           <a:p/>
           <a:p>
             <a:r>
-              <a:t>根据内部财务模型测算，快讯网络有限公司 在未来三年</a:t>
-            </a:r>
-          </a:p>
-          <a:p>
-            <a:r>
-              <a:t>收入复合增长率预计可达到 11% 左右。</a:t>
-            </a:r>
-          </a:p>
-          <a:p>
-            <a:r>
-              <a:t>该预测基于行业需求增长以及公司产能扩张计划。</a:t>
-            </a:r>
-          </a:p>
-          <a:p/>
-          <a:p/>
-          <a:p>
-            <a:r>
-              <a:t>从产业链角度看，机器人 行业主要由上游设备厂商、</a:t>
+              <a:t>从产业链角度看，半导体 行业主要由上游设备厂商、</a:t>
             </a:r>
           </a:p>
           <a:p>
@@ -4570,24 +4568,41 @@
           </a:p>
           <a:p>
             <a:r>
-              <a:t>艾提科信科技有限公司 主要位于产业链的 下游 环节。</a:t>
-            </a:r>
-          </a:p>
-          <a:p/>
-          <a:p/>
-          <a:p>
-            <a:r>
-              <a:t>根据内部财务模型测算，富罳信息有限公司 在未来三年</a:t>
-            </a:r>
-          </a:p>
-          <a:p>
-            <a:r>
-              <a:t>收入复合增长率预计可达到 25% 左右。</a:t>
-            </a:r>
-          </a:p>
-          <a:p>
-            <a:r>
-              <a:t>该预测基于行业需求增长以及公司产能扩张计划。</a:t>
+              <a:t>中建创业科技有限公司 主要位于产业链的 中游 环节。</a:t>
+            </a:r>
+          </a:p>
+          <a:p/>
+          <a:p/>
+          <a:p>
+            <a:r>
+              <a:t>从产业链角度看，医疗科技 行业主要由上游设备厂商、</a:t>
+            </a:r>
+          </a:p>
+          <a:p>
+            <a:r>
+              <a:t>中游平台企业以及下游应用厂商组成。</a:t>
+            </a:r>
+          </a:p>
+          <a:p>
+            <a:r>
+              <a:t>九方传媒有限公司 主要位于产业链的 中游 环节。</a:t>
+            </a:r>
+          </a:p>
+          <a:p/>
+          <a:p/>
+          <a:p>
+            <a:r>
+              <a:t>从产业链角度看，医疗科技 行业主要由上游设备厂商、</a:t>
+            </a:r>
+          </a:p>
+          <a:p>
+            <a:r>
+              <a:t>中游平台企业以及下游应用厂商组成。</a:t>
+            </a:r>
+          </a:p>
+          <a:p>
+            <a:r>
+              <a:t>迪摩信息有限公司 主要位于产业链的 中游 环节。</a:t>
             </a:r>
           </a:p>
           <a:p/>
@@ -4649,12 +4664,29 @@
           <a:p/>
           <a:p>
             <a:r>
-              <a:t>华辰资本旗下的 HC Quant Arbitrage Fund 在最近的资产配置会议中</a:t>
-            </a:r>
-          </a:p>
-          <a:p>
-            <a:r>
-              <a:t>讨论了 消费科技 行业的投资机会，并对 南康网络有限公司</a:t>
+              <a:t>根据内部财务模型测算，良诺科技有限公司 在未来三年</a:t>
+            </a:r>
+          </a:p>
+          <a:p>
+            <a:r>
+              <a:t>收入复合增长率预计可达到 16% 左右。</a:t>
+            </a:r>
+          </a:p>
+          <a:p>
+            <a:r>
+              <a:t>该预测基于行业需求增长以及公司产能扩张计划。</a:t>
+            </a:r>
+          </a:p>
+          <a:p/>
+          <a:p/>
+          <a:p>
+            <a:r>
+              <a:t>华辰资本旗下的 HC AI Innovation Fund 在最近的资产配置会议中</a:t>
+            </a:r>
+          </a:p>
+          <a:p>
+            <a:r>
+              <a:t>讨论了 消费科技 行业的投资机会，并对 方正科技信息有限公司</a:t>
             </a:r>
           </a:p>
           <a:p>
@@ -4666,34 +4698,17 @@
           <a:p/>
           <a:p>
             <a:r>
-              <a:t>华辰资本旗下的 HC Global Macro Fund 在最近的资产配置会议中</a:t>
-            </a:r>
-          </a:p>
-          <a:p>
-            <a:r>
-              <a:t>讨论了 云计算 行业的投资机会，并对 天益信息有限公司</a:t>
-            </a:r>
-          </a:p>
-          <a:p>
-            <a:r>
-              <a:t>进行了重点评估。</a:t>
-            </a:r>
-          </a:p>
-          <a:p/>
-          <a:p/>
-          <a:p>
-            <a:r>
-              <a:t>根据内部财务模型测算，九方信息有限公司 在未来三年</a:t>
-            </a:r>
-          </a:p>
-          <a:p>
-            <a:r>
-              <a:t>收入复合增长率预计可达到 22% 左右。</a:t>
-            </a:r>
-          </a:p>
-          <a:p>
-            <a:r>
-              <a:t>该预测基于行业需求增长以及公司产能扩张计划。</a:t>
+              <a:t>从产业链角度看，半导体 行业主要由上游设备厂商、</a:t>
+            </a:r>
+          </a:p>
+          <a:p>
+            <a:r>
+              <a:t>中游平台企业以及下游应用厂商组成。</a:t>
+            </a:r>
+          </a:p>
+          <a:p>
+            <a:r>
+              <a:t>精芯信息有限公司 主要位于产业链的 下游 环节。</a:t>
             </a:r>
           </a:p>
           <a:p/>
